--- a/문제해결프로그래밍_숙제/제출용/숙제2_2022182035.pptx
+++ b/문제해결프로그래밍_숙제/제출용/숙제2_2022182035.pptx
@@ -1085,7 +1085,7 @@
         <p:cNvPr id="1" name="Shape 431">
           <a:extLst>
             <a:ext uri="{FF2B5EF4-FFF2-40B4-BE49-F238E27FC236}">
-              <a16:creationId xmlns:a16="http://schemas.microsoft.com/office/drawing/2014/main" id="{0909D86D-59C4-0AF5-8146-4BE4C8F12101}"/>
+              <a16:creationId xmlns:a16="http://schemas.microsoft.com/office/drawing/2014/main" id="{7A428B1F-8355-29AA-E366-772A4388DF86}"/>
             </a:ext>
           </a:extLst>
         </p:cNvPr>
@@ -1105,7 +1105,7 @@
           <p:cNvPr id="432" name="Google Shape;432;g3cf4798b604_0_426:notes">
             <a:extLst>
               <a:ext uri="{FF2B5EF4-FFF2-40B4-BE49-F238E27FC236}">
-                <a16:creationId xmlns:a16="http://schemas.microsoft.com/office/drawing/2014/main" id="{039DE90B-4C9F-E08A-E491-FCE494C632B0}"/>
+                <a16:creationId xmlns:a16="http://schemas.microsoft.com/office/drawing/2014/main" id="{C2531604-DF69-EFB8-9B11-5B62C4D0166D}"/>
               </a:ext>
             </a:extLst>
           </p:cNvPr>
@@ -1152,7 +1152,7 @@
           <p:cNvPr id="433" name="Google Shape;433;g3cf4798b604_0_426:notes">
             <a:extLst>
               <a:ext uri="{FF2B5EF4-FFF2-40B4-BE49-F238E27FC236}">
-                <a16:creationId xmlns:a16="http://schemas.microsoft.com/office/drawing/2014/main" id="{481476C2-9ABF-56F4-0C09-29E2C10D3D5F}"/>
+                <a16:creationId xmlns:a16="http://schemas.microsoft.com/office/drawing/2014/main" id="{9395BF28-DAAF-97ED-1FF0-0D1E67BB7F08}"/>
               </a:ext>
             </a:extLst>
           </p:cNvPr>
@@ -1194,7 +1194,7 @@
     </p:spTree>
     <p:extLst>
       <p:ext uri="{BB962C8B-B14F-4D97-AF65-F5344CB8AC3E}">
-        <p14:creationId xmlns:p14="http://schemas.microsoft.com/office/powerpoint/2010/main" val="2303542474"/>
+        <p14:creationId xmlns:p14="http://schemas.microsoft.com/office/powerpoint/2010/main" val="1566906704"/>
       </p:ext>
     </p:extLst>
   </p:cSld>
@@ -1212,7 +1212,7 @@
         <p:cNvPr id="1" name="Shape 431">
           <a:extLst>
             <a:ext uri="{FF2B5EF4-FFF2-40B4-BE49-F238E27FC236}">
-              <a16:creationId xmlns:a16="http://schemas.microsoft.com/office/drawing/2014/main" id="{243738B3-3232-485F-C041-BB375B191083}"/>
+              <a16:creationId xmlns:a16="http://schemas.microsoft.com/office/drawing/2014/main" id="{6626487C-E6FE-E4FA-096E-3665701DFF6E}"/>
             </a:ext>
           </a:extLst>
         </p:cNvPr>
@@ -1232,7 +1232,7 @@
           <p:cNvPr id="432" name="Google Shape;432;g3cf4798b604_0_426:notes">
             <a:extLst>
               <a:ext uri="{FF2B5EF4-FFF2-40B4-BE49-F238E27FC236}">
-                <a16:creationId xmlns:a16="http://schemas.microsoft.com/office/drawing/2014/main" id="{A38A15FB-4A9A-6F4D-F139-F90D812663F7}"/>
+                <a16:creationId xmlns:a16="http://schemas.microsoft.com/office/drawing/2014/main" id="{053F6898-110C-4A65-42F0-CA70FC53A600}"/>
               </a:ext>
             </a:extLst>
           </p:cNvPr>
@@ -1279,7 +1279,7 @@
           <p:cNvPr id="433" name="Google Shape;433;g3cf4798b604_0_426:notes">
             <a:extLst>
               <a:ext uri="{FF2B5EF4-FFF2-40B4-BE49-F238E27FC236}">
-                <a16:creationId xmlns:a16="http://schemas.microsoft.com/office/drawing/2014/main" id="{D0BC515B-C347-1CC8-C783-6DB3CDA7ED90}"/>
+                <a16:creationId xmlns:a16="http://schemas.microsoft.com/office/drawing/2014/main" id="{89BC28B0-9794-43E9-A7A0-4DDE4F170653}"/>
               </a:ext>
             </a:extLst>
           </p:cNvPr>
@@ -1321,7 +1321,7 @@
     </p:spTree>
     <p:extLst>
       <p:ext uri="{BB962C8B-B14F-4D97-AF65-F5344CB8AC3E}">
-        <p14:creationId xmlns:p14="http://schemas.microsoft.com/office/powerpoint/2010/main" val="122262275"/>
+        <p14:creationId xmlns:p14="http://schemas.microsoft.com/office/powerpoint/2010/main" val="3565149576"/>
       </p:ext>
     </p:extLst>
   </p:cSld>
@@ -34179,7 +34179,7 @@
         <p:cNvPr id="1" name="Shape 434">
           <a:extLst>
             <a:ext uri="{FF2B5EF4-FFF2-40B4-BE49-F238E27FC236}">
-              <a16:creationId xmlns:a16="http://schemas.microsoft.com/office/drawing/2014/main" id="{EDE38785-F97D-21D3-D29A-BD6C1D2F5B59}"/>
+              <a16:creationId xmlns:a16="http://schemas.microsoft.com/office/drawing/2014/main" id="{40B05A81-290A-F7C1-30CF-CEED8FE288B9}"/>
             </a:ext>
           </a:extLst>
         </p:cNvPr>
@@ -34199,7 +34199,7 @@
           <p:cNvPr id="435" name="Google Shape;435;p24">
             <a:extLst>
               <a:ext uri="{FF2B5EF4-FFF2-40B4-BE49-F238E27FC236}">
-                <a16:creationId xmlns:a16="http://schemas.microsoft.com/office/drawing/2014/main" id="{B059EAC4-C138-E5CB-C71B-F0A0865328A7}"/>
+                <a16:creationId xmlns:a16="http://schemas.microsoft.com/office/drawing/2014/main" id="{5BF956BD-4CAD-DC00-1113-6F357FA14C9E}"/>
               </a:ext>
             </a:extLst>
           </p:cNvPr>
@@ -34226,9 +34226,6 @@
           <a:lstStyle/>
           <a:p>
             <a:pPr marL="50800" lvl="0"/>
-            <a:br>
-              <a:rPr lang="en-US" altLang="ko-KR" dirty="0"/>
-            </a:br>
             <a:endParaRPr dirty="0"/>
           </a:p>
         </p:txBody>
@@ -34236,7 +34233,7 @@
     </p:spTree>
     <p:extLst>
       <p:ext uri="{BB962C8B-B14F-4D97-AF65-F5344CB8AC3E}">
-        <p14:creationId xmlns:p14="http://schemas.microsoft.com/office/powerpoint/2010/main" val="2897710347"/>
+        <p14:creationId xmlns:p14="http://schemas.microsoft.com/office/powerpoint/2010/main" val="1633952523"/>
       </p:ext>
     </p:extLst>
   </p:cSld>
@@ -34254,7 +34251,7 @@
         <p:cNvPr id="1" name="Shape 434">
           <a:extLst>
             <a:ext uri="{FF2B5EF4-FFF2-40B4-BE49-F238E27FC236}">
-              <a16:creationId xmlns:a16="http://schemas.microsoft.com/office/drawing/2014/main" id="{F72052D0-1D85-EDDD-AB62-6A9AB29CD27D}"/>
+              <a16:creationId xmlns:a16="http://schemas.microsoft.com/office/drawing/2014/main" id="{FC0D2322-8AAA-3EEF-9FB5-B679B46C08A8}"/>
             </a:ext>
           </a:extLst>
         </p:cNvPr>
@@ -34274,7 +34271,7 @@
           <p:cNvPr id="435" name="Google Shape;435;p24">
             <a:extLst>
               <a:ext uri="{FF2B5EF4-FFF2-40B4-BE49-F238E27FC236}">
-                <a16:creationId xmlns:a16="http://schemas.microsoft.com/office/drawing/2014/main" id="{CE91D543-9B9E-C386-8C48-B6612A191FD5}"/>
+                <a16:creationId xmlns:a16="http://schemas.microsoft.com/office/drawing/2014/main" id="{B9C18BF8-FEDC-1328-FD08-C66093382CE2}"/>
               </a:ext>
             </a:extLst>
           </p:cNvPr>
@@ -34301,17 +34298,93 @@
           <a:lstStyle/>
           <a:p>
             <a:pPr marL="50800" lvl="0"/>
-            <a:br>
-              <a:rPr lang="en-US" altLang="ko-KR" dirty="0"/>
-            </a:br>
+            <a:r>
+              <a:rPr lang="en-US" dirty="0"/>
+              <a:t>5. </a:t>
+            </a:r>
+            <a:r>
+              <a:rPr lang="ko-KR" altLang="en-US" sz="2800" dirty="0"/>
+              <a:t>체육복 </a:t>
+            </a:r>
+            <a:r>
+              <a:rPr lang="en-US" altLang="ko-KR" sz="2800" dirty="0"/>
+              <a:t>(Programmers, </a:t>
+            </a:r>
+            <a:r>
+              <a:rPr lang="ko-KR" altLang="en-US" sz="2800" dirty="0" err="1"/>
+              <a:t>그리디</a:t>
+            </a:r>
+            <a:r>
+              <a:rPr lang="en-US" altLang="ko-KR" sz="2800" dirty="0"/>
+              <a:t>)</a:t>
+            </a:r>
             <a:endParaRPr dirty="0"/>
           </a:p>
         </p:txBody>
       </p:sp>
+      <p:pic>
+        <p:nvPicPr>
+          <p:cNvPr id="5" name="그림 4" descr="텍스트, 스크린샷, 디스플레이, 소프트웨어이(가) 표시된 사진&#10;&#10;자동 생성된 설명">
+            <a:extLst>
+              <a:ext uri="{FF2B5EF4-FFF2-40B4-BE49-F238E27FC236}">
+                <a16:creationId xmlns:a16="http://schemas.microsoft.com/office/drawing/2014/main" id="{8B1F5207-6A86-2C16-83B9-1C3B3D1C0653}"/>
+              </a:ext>
+            </a:extLst>
+          </p:cNvPr>
+          <p:cNvPicPr>
+            <a:picLocks noChangeAspect="1"/>
+          </p:cNvPicPr>
+          <p:nvPr/>
+        </p:nvPicPr>
+        <p:blipFill>
+          <a:blip r:embed="rId3"/>
+          <a:srcRect t="51869"/>
+          <a:stretch/>
+        </p:blipFill>
+        <p:spPr>
+          <a:xfrm>
+            <a:off x="4571987" y="1017270"/>
+            <a:ext cx="3958195" cy="3108960"/>
+          </a:xfrm>
+          <a:prstGeom prst="rect">
+            <a:avLst/>
+          </a:prstGeom>
+        </p:spPr>
+      </p:pic>
+      <p:pic>
+        <p:nvPicPr>
+          <p:cNvPr id="7" name="그림 6" descr="텍스트, 스크린샷, 소프트웨어, 멀티미디어 소프트웨어이(가) 표시된 사진&#10;&#10;자동 생성된 설명">
+            <a:extLst>
+              <a:ext uri="{FF2B5EF4-FFF2-40B4-BE49-F238E27FC236}">
+                <a16:creationId xmlns:a16="http://schemas.microsoft.com/office/drawing/2014/main" id="{B3552CAC-0BFD-DF3D-E6D9-16675D1D6DAC}"/>
+              </a:ext>
+            </a:extLst>
+          </p:cNvPr>
+          <p:cNvPicPr>
+            <a:picLocks noChangeAspect="1"/>
+          </p:cNvPicPr>
+          <p:nvPr/>
+        </p:nvPicPr>
+        <p:blipFill>
+          <a:blip r:embed="rId4"/>
+          <a:stretch>
+            <a:fillRect/>
+          </a:stretch>
+        </p:blipFill>
+        <p:spPr>
+          <a:xfrm>
+            <a:off x="613818" y="1017270"/>
+            <a:ext cx="3837185" cy="3108960"/>
+          </a:xfrm>
+          <a:prstGeom prst="rect">
+            <a:avLst/>
+          </a:prstGeom>
+        </p:spPr>
+      </p:pic>
     </p:spTree>
     <p:extLst>
       <p:ext uri="{BB962C8B-B14F-4D97-AF65-F5344CB8AC3E}">
-        <p14:creationId xmlns:p14="http://schemas.microsoft.com/office/powerpoint/2010/main" val="2262443188"/>
+        <p14:creationId xmlns:p14="http://schemas.microsoft.com/office/powerpoint/2010/main" val="539363641"/>
       </p:ext>
     </p:extLst>
   </p:cSld>

--- a/문제해결프로그래밍_숙제/제출용/숙제2_2022182035.pptx
+++ b/문제해결프로그래밍_숙제/제출용/숙제2_2022182035.pptx
@@ -10,8 +10,8 @@
   <p:sldIdLst>
     <p:sldId id="256" r:id="rId2"/>
     <p:sldId id="257" r:id="rId3"/>
-    <p:sldId id="258" r:id="rId4"/>
-    <p:sldId id="259" r:id="rId5"/>
+    <p:sldId id="259" r:id="rId4"/>
+    <p:sldId id="258" r:id="rId5"/>
     <p:sldId id="260" r:id="rId6"/>
   </p:sldIdLst>
   <p:sldSz cx="9144000" cy="5143500" type="screen16x9"/>
@@ -958,6 +958,133 @@
         <p:cNvPr id="1" name="Shape 431">
           <a:extLst>
             <a:ext uri="{FF2B5EF4-FFF2-40B4-BE49-F238E27FC236}">
+              <a16:creationId xmlns:a16="http://schemas.microsoft.com/office/drawing/2014/main" id="{7A428B1F-8355-29AA-E366-772A4388DF86}"/>
+            </a:ext>
+          </a:extLst>
+        </p:cNvPr>
+        <p:cNvGrpSpPr/>
+        <p:nvPr/>
+      </p:nvGrpSpPr>
+      <p:grpSpPr>
+        <a:xfrm>
+          <a:off x="0" y="0"/>
+          <a:ext cx="0" cy="0"/>
+          <a:chOff x="0" y="0"/>
+          <a:chExt cx="0" cy="0"/>
+        </a:xfrm>
+      </p:grpSpPr>
+      <p:sp>
+        <p:nvSpPr>
+          <p:cNvPr id="432" name="Google Shape;432;g3cf4798b604_0_426:notes">
+            <a:extLst>
+              <a:ext uri="{FF2B5EF4-FFF2-40B4-BE49-F238E27FC236}">
+                <a16:creationId xmlns:a16="http://schemas.microsoft.com/office/drawing/2014/main" id="{C2531604-DF69-EFB8-9B11-5B62C4D0166D}"/>
+              </a:ext>
+            </a:extLst>
+          </p:cNvPr>
+          <p:cNvSpPr>
+            <a:spLocks noGrp="1" noRot="1" noChangeAspect="1"/>
+          </p:cNvSpPr>
+          <p:nvPr>
+            <p:ph type="sldImg" idx="2"/>
+          </p:nvPr>
+        </p:nvSpPr>
+        <p:spPr>
+          <a:xfrm>
+            <a:off x="381000" y="685800"/>
+            <a:ext cx="6096000" cy="3429000"/>
+          </a:xfrm>
+          <a:custGeom>
+            <a:avLst/>
+            <a:gdLst/>
+            <a:ahLst/>
+            <a:cxnLst/>
+            <a:rect l="l" t="t" r="r" b="b"/>
+            <a:pathLst>
+              <a:path w="120000" h="120000" extrusionOk="0">
+                <a:moveTo>
+                  <a:pt x="0" y="0"/>
+                </a:moveTo>
+                <a:lnTo>
+                  <a:pt x="120000" y="0"/>
+                </a:lnTo>
+                <a:lnTo>
+                  <a:pt x="120000" y="120000"/>
+                </a:lnTo>
+                <a:lnTo>
+                  <a:pt x="0" y="120000"/>
+                </a:lnTo>
+                <a:close/>
+              </a:path>
+            </a:pathLst>
+          </a:custGeom>
+        </p:spPr>
+      </p:sp>
+      <p:sp>
+        <p:nvSpPr>
+          <p:cNvPr id="433" name="Google Shape;433;g3cf4798b604_0_426:notes">
+            <a:extLst>
+              <a:ext uri="{FF2B5EF4-FFF2-40B4-BE49-F238E27FC236}">
+                <a16:creationId xmlns:a16="http://schemas.microsoft.com/office/drawing/2014/main" id="{9395BF28-DAAF-97ED-1FF0-0D1E67BB7F08}"/>
+              </a:ext>
+            </a:extLst>
+          </p:cNvPr>
+          <p:cNvSpPr txBox="1">
+            <a:spLocks noGrp="1"/>
+          </p:cNvSpPr>
+          <p:nvPr>
+            <p:ph type="body" idx="1"/>
+          </p:nvPr>
+        </p:nvSpPr>
+        <p:spPr>
+          <a:xfrm>
+            <a:off x="685800" y="4343400"/>
+            <a:ext cx="5486400" cy="4114800"/>
+          </a:xfrm>
+          <a:prstGeom prst="rect">
+            <a:avLst/>
+          </a:prstGeom>
+        </p:spPr>
+        <p:txBody>
+          <a:bodyPr spcFirstLastPara="1" wrap="square" lIns="91425" tIns="91425" rIns="91425" bIns="91425" anchor="t" anchorCtr="0">
+            <a:noAutofit/>
+          </a:bodyPr>
+          <a:lstStyle/>
+          <a:p>
+            <a:pPr marL="0" lvl="0" indent="0" algn="l" rtl="0">
+              <a:spcBef>
+                <a:spcPts val="0"/>
+              </a:spcBef>
+              <a:spcAft>
+                <a:spcPts val="0"/>
+              </a:spcAft>
+              <a:buNone/>
+            </a:pPr>
+            <a:endParaRPr/>
+          </a:p>
+        </p:txBody>
+      </p:sp>
+    </p:spTree>
+    <p:extLst>
+      <p:ext uri="{BB962C8B-B14F-4D97-AF65-F5344CB8AC3E}">
+        <p14:creationId xmlns:p14="http://schemas.microsoft.com/office/powerpoint/2010/main" val="1566906704"/>
+      </p:ext>
+    </p:extLst>
+  </p:cSld>
+  <p:clrMapOvr>
+    <a:masterClrMapping/>
+  </p:clrMapOvr>
+</p:notes>
+</file>
+
+<file path=ppt/notesSlides/notesSlide4.xml><?xml version="1.0" encoding="utf-8"?>
+<p:notes xmlns:a="http://schemas.openxmlformats.org/drawingml/2006/main" xmlns:r="http://schemas.openxmlformats.org/officeDocument/2006/relationships" xmlns:p="http://schemas.openxmlformats.org/presentationml/2006/main" showMasterSp="0" showMasterPhAnim="0">
+  <p:cSld>
+    <p:spTree>
+      <p:nvGrpSpPr>
+        <p:cNvPr id="1" name="Shape 431">
+          <a:extLst>
+            <a:ext uri="{FF2B5EF4-FFF2-40B4-BE49-F238E27FC236}">
               <a16:creationId xmlns:a16="http://schemas.microsoft.com/office/drawing/2014/main" id="{7F6099A1-30FC-6703-A132-7B7AF177779B}"/>
             </a:ext>
           </a:extLst>
@@ -1068,133 +1195,6 @@
     <p:extLst>
       <p:ext uri="{BB962C8B-B14F-4D97-AF65-F5344CB8AC3E}">
         <p14:creationId xmlns:p14="http://schemas.microsoft.com/office/powerpoint/2010/main" val="2692290938"/>
-      </p:ext>
-    </p:extLst>
-  </p:cSld>
-  <p:clrMapOvr>
-    <a:masterClrMapping/>
-  </p:clrMapOvr>
-</p:notes>
-</file>
-
-<file path=ppt/notesSlides/notesSlide4.xml><?xml version="1.0" encoding="utf-8"?>
-<p:notes xmlns:a="http://schemas.openxmlformats.org/drawingml/2006/main" xmlns:r="http://schemas.openxmlformats.org/officeDocument/2006/relationships" xmlns:p="http://schemas.openxmlformats.org/presentationml/2006/main" showMasterSp="0" showMasterPhAnim="0">
-  <p:cSld>
-    <p:spTree>
-      <p:nvGrpSpPr>
-        <p:cNvPr id="1" name="Shape 431">
-          <a:extLst>
-            <a:ext uri="{FF2B5EF4-FFF2-40B4-BE49-F238E27FC236}">
-              <a16:creationId xmlns:a16="http://schemas.microsoft.com/office/drawing/2014/main" id="{7A428B1F-8355-29AA-E366-772A4388DF86}"/>
-            </a:ext>
-          </a:extLst>
-        </p:cNvPr>
-        <p:cNvGrpSpPr/>
-        <p:nvPr/>
-      </p:nvGrpSpPr>
-      <p:grpSpPr>
-        <a:xfrm>
-          <a:off x="0" y="0"/>
-          <a:ext cx="0" cy="0"/>
-          <a:chOff x="0" y="0"/>
-          <a:chExt cx="0" cy="0"/>
-        </a:xfrm>
-      </p:grpSpPr>
-      <p:sp>
-        <p:nvSpPr>
-          <p:cNvPr id="432" name="Google Shape;432;g3cf4798b604_0_426:notes">
-            <a:extLst>
-              <a:ext uri="{FF2B5EF4-FFF2-40B4-BE49-F238E27FC236}">
-                <a16:creationId xmlns:a16="http://schemas.microsoft.com/office/drawing/2014/main" id="{C2531604-DF69-EFB8-9B11-5B62C4D0166D}"/>
-              </a:ext>
-            </a:extLst>
-          </p:cNvPr>
-          <p:cNvSpPr>
-            <a:spLocks noGrp="1" noRot="1" noChangeAspect="1"/>
-          </p:cNvSpPr>
-          <p:nvPr>
-            <p:ph type="sldImg" idx="2"/>
-          </p:nvPr>
-        </p:nvSpPr>
-        <p:spPr>
-          <a:xfrm>
-            <a:off x="381000" y="685800"/>
-            <a:ext cx="6096000" cy="3429000"/>
-          </a:xfrm>
-          <a:custGeom>
-            <a:avLst/>
-            <a:gdLst/>
-            <a:ahLst/>
-            <a:cxnLst/>
-            <a:rect l="l" t="t" r="r" b="b"/>
-            <a:pathLst>
-              <a:path w="120000" h="120000" extrusionOk="0">
-                <a:moveTo>
-                  <a:pt x="0" y="0"/>
-                </a:moveTo>
-                <a:lnTo>
-                  <a:pt x="120000" y="0"/>
-                </a:lnTo>
-                <a:lnTo>
-                  <a:pt x="120000" y="120000"/>
-                </a:lnTo>
-                <a:lnTo>
-                  <a:pt x="0" y="120000"/>
-                </a:lnTo>
-                <a:close/>
-              </a:path>
-            </a:pathLst>
-          </a:custGeom>
-        </p:spPr>
-      </p:sp>
-      <p:sp>
-        <p:nvSpPr>
-          <p:cNvPr id="433" name="Google Shape;433;g3cf4798b604_0_426:notes">
-            <a:extLst>
-              <a:ext uri="{FF2B5EF4-FFF2-40B4-BE49-F238E27FC236}">
-                <a16:creationId xmlns:a16="http://schemas.microsoft.com/office/drawing/2014/main" id="{9395BF28-DAAF-97ED-1FF0-0D1E67BB7F08}"/>
-              </a:ext>
-            </a:extLst>
-          </p:cNvPr>
-          <p:cNvSpPr txBox="1">
-            <a:spLocks noGrp="1"/>
-          </p:cNvSpPr>
-          <p:nvPr>
-            <p:ph type="body" idx="1"/>
-          </p:nvPr>
-        </p:nvSpPr>
-        <p:spPr>
-          <a:xfrm>
-            <a:off x="685800" y="4343400"/>
-            <a:ext cx="5486400" cy="4114800"/>
-          </a:xfrm>
-          <a:prstGeom prst="rect">
-            <a:avLst/>
-          </a:prstGeom>
-        </p:spPr>
-        <p:txBody>
-          <a:bodyPr spcFirstLastPara="1" wrap="square" lIns="91425" tIns="91425" rIns="91425" bIns="91425" anchor="t" anchorCtr="0">
-            <a:noAutofit/>
-          </a:bodyPr>
-          <a:lstStyle/>
-          <a:p>
-            <a:pPr marL="0" lvl="0" indent="0" algn="l" rtl="0">
-              <a:spcBef>
-                <a:spcPts val="0"/>
-              </a:spcBef>
-              <a:spcAft>
-                <a:spcPts val="0"/>
-              </a:spcAft>
-              <a:buNone/>
-            </a:pPr>
-            <a:endParaRPr/>
-          </a:p>
-        </p:txBody>
-      </p:sp>
-    </p:spTree>
-    <p:extLst>
-      <p:ext uri="{BB962C8B-B14F-4D97-AF65-F5344CB8AC3E}">
-        <p14:creationId xmlns:p14="http://schemas.microsoft.com/office/powerpoint/2010/main" val="1566906704"/>
       </p:ext>
     </p:extLst>
   </p:cSld>
@@ -34086,6 +34086,66 @@
           </a:p>
         </p:txBody>
       </p:sp>
+      <p:pic>
+        <p:nvPicPr>
+          <p:cNvPr id="3" name="그림 2">
+            <a:extLst>
+              <a:ext uri="{FF2B5EF4-FFF2-40B4-BE49-F238E27FC236}">
+                <a16:creationId xmlns:a16="http://schemas.microsoft.com/office/drawing/2014/main" id="{7669B979-5D77-F1B4-13AE-E0234BF71A9C}"/>
+              </a:ext>
+            </a:extLst>
+          </p:cNvPr>
+          <p:cNvPicPr>
+            <a:picLocks noChangeAspect="1"/>
+          </p:cNvPicPr>
+          <p:nvPr/>
+        </p:nvPicPr>
+        <p:blipFill>
+          <a:blip r:embed="rId3"/>
+          <a:stretch>
+            <a:fillRect/>
+          </a:stretch>
+        </p:blipFill>
+        <p:spPr>
+          <a:xfrm>
+            <a:off x="1370667" y="845493"/>
+            <a:ext cx="2660845" cy="4097020"/>
+          </a:xfrm>
+          <a:prstGeom prst="rect">
+            <a:avLst/>
+          </a:prstGeom>
+        </p:spPr>
+      </p:pic>
+      <p:pic>
+        <p:nvPicPr>
+          <p:cNvPr id="5" name="그림 4">
+            <a:extLst>
+              <a:ext uri="{FF2B5EF4-FFF2-40B4-BE49-F238E27FC236}">
+                <a16:creationId xmlns:a16="http://schemas.microsoft.com/office/drawing/2014/main" id="{BA181AFD-93A0-0311-8BFB-47AD5EC0A3F5}"/>
+              </a:ext>
+            </a:extLst>
+          </p:cNvPr>
+          <p:cNvPicPr>
+            <a:picLocks noChangeAspect="1"/>
+          </p:cNvPicPr>
+          <p:nvPr/>
+        </p:nvPicPr>
+        <p:blipFill>
+          <a:blip r:embed="rId4"/>
+          <a:stretch>
+            <a:fillRect/>
+          </a:stretch>
+        </p:blipFill>
+        <p:spPr>
+          <a:xfrm>
+            <a:off x="4149276" y="2367804"/>
+            <a:ext cx="4729716" cy="407892"/>
+          </a:xfrm>
+          <a:prstGeom prst="rect">
+            <a:avLst/>
+          </a:prstGeom>
+        </p:spPr>
+      </p:pic>
     </p:spTree>
     <p:extLst>
       <p:ext uri="{BB962C8B-B14F-4D97-AF65-F5344CB8AC3E}">
@@ -34100,6 +34160,170 @@
 </file>
 
 <file path=ppt/slides/slide3.xml><?xml version="1.0" encoding="utf-8"?>
+<p:sld xmlns:a="http://schemas.openxmlformats.org/drawingml/2006/main" xmlns:r="http://schemas.openxmlformats.org/officeDocument/2006/relationships" xmlns:p="http://schemas.openxmlformats.org/presentationml/2006/main">
+  <p:cSld>
+    <p:spTree>
+      <p:nvGrpSpPr>
+        <p:cNvPr id="1" name="Shape 434">
+          <a:extLst>
+            <a:ext uri="{FF2B5EF4-FFF2-40B4-BE49-F238E27FC236}">
+              <a16:creationId xmlns:a16="http://schemas.microsoft.com/office/drawing/2014/main" id="{40B05A81-290A-F7C1-30CF-CEED8FE288B9}"/>
+            </a:ext>
+          </a:extLst>
+        </p:cNvPr>
+        <p:cNvGrpSpPr/>
+        <p:nvPr/>
+      </p:nvGrpSpPr>
+      <p:grpSpPr>
+        <a:xfrm>
+          <a:off x="0" y="0"/>
+          <a:ext cx="0" cy="0"/>
+          <a:chOff x="0" y="0"/>
+          <a:chExt cx="0" cy="0"/>
+        </a:xfrm>
+      </p:grpSpPr>
+      <p:sp>
+        <p:nvSpPr>
+          <p:cNvPr id="435" name="Google Shape;435;p24">
+            <a:extLst>
+              <a:ext uri="{FF2B5EF4-FFF2-40B4-BE49-F238E27FC236}">
+                <a16:creationId xmlns:a16="http://schemas.microsoft.com/office/drawing/2014/main" id="{5BF956BD-4CAD-DC00-1113-6F357FA14C9E}"/>
+              </a:ext>
+            </a:extLst>
+          </p:cNvPr>
+          <p:cNvSpPr txBox="1">
+            <a:spLocks noGrp="1"/>
+          </p:cNvSpPr>
+          <p:nvPr>
+            <p:ph type="title"/>
+          </p:nvPr>
+        </p:nvSpPr>
+        <p:spPr>
+          <a:xfrm>
+            <a:off x="722387" y="272793"/>
+            <a:ext cx="7699200" cy="572700"/>
+          </a:xfrm>
+          <a:prstGeom prst="rect">
+            <a:avLst/>
+          </a:prstGeom>
+        </p:spPr>
+        <p:txBody>
+          <a:bodyPr spcFirstLastPara="1" wrap="square" lIns="91425" tIns="91425" rIns="91425" bIns="91425" anchor="t" anchorCtr="0">
+            <a:noAutofit/>
+          </a:bodyPr>
+          <a:lstStyle/>
+          <a:p>
+            <a:pPr marL="50800" lvl="0"/>
+            <a:r>
+              <a:rPr lang="en-US" dirty="0"/>
+              <a:t>3. </a:t>
+            </a:r>
+            <a:r>
+              <a:rPr lang="ko-KR" altLang="en-US" dirty="0"/>
+              <a:t>자산 증감</a:t>
+            </a:r>
+            <a:r>
+              <a:rPr lang="en-US" altLang="ko-KR" dirty="0"/>
+              <a:t> (</a:t>
+            </a:r>
+            <a:r>
+              <a:rPr lang="en-US" altLang="ko-KR" dirty="0" err="1"/>
+              <a:t>TUKorea</a:t>
+            </a:r>
+            <a:r>
+              <a:rPr lang="en-US" altLang="ko-KR" dirty="0"/>
+              <a:t>, </a:t>
+            </a:r>
+            <a:r>
+              <a:rPr lang="ko-KR" altLang="en-US" dirty="0"/>
+              <a:t>구현</a:t>
+            </a:r>
+            <a:r>
+              <a:rPr lang="en-US" altLang="ko-KR" dirty="0"/>
+              <a:t>)</a:t>
+            </a:r>
+            <a:r>
+              <a:rPr lang="en-US" dirty="0"/>
+              <a:t> </a:t>
+            </a:r>
+            <a:endParaRPr dirty="0"/>
+          </a:p>
+        </p:txBody>
+      </p:sp>
+      <p:pic>
+        <p:nvPicPr>
+          <p:cNvPr id="3" name="그림 2">
+            <a:extLst>
+              <a:ext uri="{FF2B5EF4-FFF2-40B4-BE49-F238E27FC236}">
+                <a16:creationId xmlns:a16="http://schemas.microsoft.com/office/drawing/2014/main" id="{E706F0A0-6016-84B5-DCC9-E37B8ACDF735}"/>
+              </a:ext>
+            </a:extLst>
+          </p:cNvPr>
+          <p:cNvPicPr>
+            <a:picLocks noChangeAspect="1"/>
+          </p:cNvPicPr>
+          <p:nvPr/>
+        </p:nvPicPr>
+        <p:blipFill>
+          <a:blip r:embed="rId3"/>
+          <a:stretch>
+            <a:fillRect/>
+          </a:stretch>
+        </p:blipFill>
+        <p:spPr>
+          <a:xfrm>
+            <a:off x="1609224" y="901746"/>
+            <a:ext cx="2209759" cy="3968961"/>
+          </a:xfrm>
+          <a:prstGeom prst="rect">
+            <a:avLst/>
+          </a:prstGeom>
+        </p:spPr>
+      </p:pic>
+      <p:pic>
+        <p:nvPicPr>
+          <p:cNvPr id="5" name="그림 4">
+            <a:extLst>
+              <a:ext uri="{FF2B5EF4-FFF2-40B4-BE49-F238E27FC236}">
+                <a16:creationId xmlns:a16="http://schemas.microsoft.com/office/drawing/2014/main" id="{07AD5465-13B9-5047-9E92-61A065CB3F6A}"/>
+              </a:ext>
+            </a:extLst>
+          </p:cNvPr>
+          <p:cNvPicPr>
+            <a:picLocks noChangeAspect="1"/>
+          </p:cNvPicPr>
+          <p:nvPr/>
+        </p:nvPicPr>
+        <p:blipFill>
+          <a:blip r:embed="rId4"/>
+          <a:stretch>
+            <a:fillRect/>
+          </a:stretch>
+        </p:blipFill>
+        <p:spPr>
+          <a:xfrm>
+            <a:off x="3955472" y="1514750"/>
+            <a:ext cx="4528460" cy="2274593"/>
+          </a:xfrm>
+          <a:prstGeom prst="rect">
+            <a:avLst/>
+          </a:prstGeom>
+        </p:spPr>
+      </p:pic>
+    </p:spTree>
+    <p:extLst>
+      <p:ext uri="{BB962C8B-B14F-4D97-AF65-F5344CB8AC3E}">
+        <p14:creationId xmlns:p14="http://schemas.microsoft.com/office/powerpoint/2010/main" val="1633952523"/>
+      </p:ext>
+    </p:extLst>
+  </p:cSld>
+  <p:clrMapOvr>
+    <a:masterClrMapping/>
+  </p:clrMapOvr>
+</p:sld>
+</file>
+
+<file path=ppt/slides/slide4.xml><?xml version="1.0" encoding="utf-8"?>
 <p:sld xmlns:a="http://schemas.openxmlformats.org/drawingml/2006/main" xmlns:r="http://schemas.openxmlformats.org/officeDocument/2006/relationships" xmlns:p="http://schemas.openxmlformats.org/presentationml/2006/main">
   <p:cSld>
     <p:spTree>
@@ -34154,86 +34378,102 @@
           <a:lstStyle/>
           <a:p>
             <a:pPr marL="50800" lvl="0"/>
+            <a:r>
+              <a:rPr lang="en-US" dirty="0"/>
+              <a:t>4. </a:t>
+            </a:r>
+            <a:r>
+              <a:rPr lang="ko-KR" altLang="en-US" dirty="0"/>
+              <a:t>균형 잡힌 영양소 </a:t>
+            </a:r>
+            <a:r>
+              <a:rPr lang="en-US" altLang="ko-KR" dirty="0"/>
+              <a:t>(</a:t>
+            </a:r>
+            <a:r>
+              <a:rPr lang="en-US" altLang="ko-KR" dirty="0" err="1"/>
+              <a:t>TUKorea</a:t>
+            </a:r>
+            <a:r>
+              <a:rPr lang="en-US" altLang="ko-KR" dirty="0"/>
+              <a:t>, </a:t>
+            </a:r>
+            <a:r>
+              <a:rPr lang="ko-KR" altLang="en-US" dirty="0"/>
+              <a:t>조합</a:t>
+            </a:r>
+            <a:r>
+              <a:rPr lang="en-US" altLang="ko-KR" dirty="0"/>
+              <a:t>)</a:t>
+            </a:r>
             <a:endParaRPr dirty="0"/>
           </a:p>
         </p:txBody>
       </p:sp>
-    </p:spTree>
-    <p:extLst>
-      <p:ext uri="{BB962C8B-B14F-4D97-AF65-F5344CB8AC3E}">
-        <p14:creationId xmlns:p14="http://schemas.microsoft.com/office/powerpoint/2010/main" val="3036014935"/>
-      </p:ext>
-    </p:extLst>
-  </p:cSld>
-  <p:clrMapOvr>
-    <a:masterClrMapping/>
-  </p:clrMapOvr>
-</p:sld>
-</file>
-
-<file path=ppt/slides/slide4.xml><?xml version="1.0" encoding="utf-8"?>
-<p:sld xmlns:a="http://schemas.openxmlformats.org/drawingml/2006/main" xmlns:r="http://schemas.openxmlformats.org/officeDocument/2006/relationships" xmlns:p="http://schemas.openxmlformats.org/presentationml/2006/main">
-  <p:cSld>
-    <p:spTree>
-      <p:nvGrpSpPr>
-        <p:cNvPr id="1" name="Shape 434">
-          <a:extLst>
-            <a:ext uri="{FF2B5EF4-FFF2-40B4-BE49-F238E27FC236}">
-              <a16:creationId xmlns:a16="http://schemas.microsoft.com/office/drawing/2014/main" id="{40B05A81-290A-F7C1-30CF-CEED8FE288B9}"/>
-            </a:ext>
-          </a:extLst>
-        </p:cNvPr>
-        <p:cNvGrpSpPr/>
-        <p:nvPr/>
-      </p:nvGrpSpPr>
-      <p:grpSpPr>
-        <a:xfrm>
-          <a:off x="0" y="0"/>
-          <a:ext cx="0" cy="0"/>
-          <a:chOff x="0" y="0"/>
-          <a:chExt cx="0" cy="0"/>
-        </a:xfrm>
-      </p:grpSpPr>
-      <p:sp>
-        <p:nvSpPr>
-          <p:cNvPr id="435" name="Google Shape;435;p24">
+      <p:pic>
+        <p:nvPicPr>
+          <p:cNvPr id="3" name="그림 2">
             <a:extLst>
               <a:ext uri="{FF2B5EF4-FFF2-40B4-BE49-F238E27FC236}">
-                <a16:creationId xmlns:a16="http://schemas.microsoft.com/office/drawing/2014/main" id="{5BF956BD-4CAD-DC00-1113-6F357FA14C9E}"/>
+                <a16:creationId xmlns:a16="http://schemas.microsoft.com/office/drawing/2014/main" id="{2D5A5A9A-849F-86CC-3659-0A3F2929775E}"/>
               </a:ext>
             </a:extLst>
           </p:cNvPr>
-          <p:cNvSpPr txBox="1">
-            <a:spLocks noGrp="1"/>
-          </p:cNvSpPr>
-          <p:nvPr>
-            <p:ph type="title"/>
-          </p:nvPr>
-        </p:nvSpPr>
+          <p:cNvPicPr>
+            <a:picLocks noChangeAspect="1"/>
+          </p:cNvPicPr>
+          <p:nvPr/>
+        </p:nvPicPr>
+        <p:blipFill>
+          <a:blip r:embed="rId3"/>
+          <a:stretch>
+            <a:fillRect/>
+          </a:stretch>
+        </p:blipFill>
         <p:spPr>
           <a:xfrm>
-            <a:off x="722387" y="272793"/>
-            <a:ext cx="7699200" cy="572700"/>
+            <a:off x="1299559" y="784542"/>
+            <a:ext cx="2211876" cy="4126400"/>
           </a:xfrm>
           <a:prstGeom prst="rect">
             <a:avLst/>
           </a:prstGeom>
         </p:spPr>
-        <p:txBody>
-          <a:bodyPr spcFirstLastPara="1" wrap="square" lIns="91425" tIns="91425" rIns="91425" bIns="91425" anchor="t" anchorCtr="0">
-            <a:noAutofit/>
-          </a:bodyPr>
-          <a:lstStyle/>
-          <a:p>
-            <a:pPr marL="50800" lvl="0"/>
-            <a:endParaRPr dirty="0"/>
-          </a:p>
-        </p:txBody>
-      </p:sp>
+      </p:pic>
+      <p:pic>
+        <p:nvPicPr>
+          <p:cNvPr id="5" name="그림 4" descr="텍스트, 스크린샷, 번호, 폰트이(가) 표시된 사진&#10;&#10;자동 생성된 설명">
+            <a:extLst>
+              <a:ext uri="{FF2B5EF4-FFF2-40B4-BE49-F238E27FC236}">
+                <a16:creationId xmlns:a16="http://schemas.microsoft.com/office/drawing/2014/main" id="{E63C9E93-10B6-29D5-FAD5-E97374534BB5}"/>
+              </a:ext>
+            </a:extLst>
+          </p:cNvPr>
+          <p:cNvPicPr>
+            <a:picLocks noChangeAspect="1"/>
+          </p:cNvPicPr>
+          <p:nvPr/>
+        </p:nvPicPr>
+        <p:blipFill>
+          <a:blip r:embed="rId4"/>
+          <a:stretch>
+            <a:fillRect/>
+          </a:stretch>
+        </p:blipFill>
+        <p:spPr>
+          <a:xfrm>
+            <a:off x="3646646" y="1608455"/>
+            <a:ext cx="5150947" cy="1926589"/>
+          </a:xfrm>
+          <a:prstGeom prst="rect">
+            <a:avLst/>
+          </a:prstGeom>
+        </p:spPr>
+      </p:pic>
     </p:spTree>
     <p:extLst>
       <p:ext uri="{BB962C8B-B14F-4D97-AF65-F5344CB8AC3E}">
-        <p14:creationId xmlns:p14="http://schemas.microsoft.com/office/powerpoint/2010/main" val="1633952523"/>
+        <p14:creationId xmlns:p14="http://schemas.microsoft.com/office/powerpoint/2010/main" val="3036014935"/>
       </p:ext>
     </p:extLst>
   </p:cSld>
@@ -34343,8 +34583,8 @@
         </p:blipFill>
         <p:spPr>
           <a:xfrm>
-            <a:off x="4571987" y="1017270"/>
-            <a:ext cx="3958195" cy="3108960"/>
+            <a:off x="4571987" y="1017268"/>
+            <a:ext cx="4269964" cy="3353839"/>
           </a:xfrm>
           <a:prstGeom prst="rect">
             <a:avLst/>
@@ -34373,8 +34613,8 @@
         </p:blipFill>
         <p:spPr>
           <a:xfrm>
-            <a:off x="613818" y="1017270"/>
-            <a:ext cx="3837185" cy="3108960"/>
+            <a:off x="336727" y="1017269"/>
+            <a:ext cx="4139421" cy="3353838"/>
           </a:xfrm>
           <a:prstGeom prst="rect">
             <a:avLst/>
